--- a/templates.pptx
+++ b/templates.pptx
@@ -6,6 +6,7 @@
   </p:sldMasterIdLst>
   <p:sldIdLst>
     <p:sldId id="256" r:id="rId7"/>
+    <p:sldId id="257" r:id="rId9"/>
   </p:sldIdLst>
   <p:sldSz cx="12192000" cy="6858000" type="screen4x3"/>
   <p:notesSz cx="6858000" cy="9144000"/>
@@ -503,6 +504,76 @@
           <a:p>
             <a:r>
               <a:t>J2W_TEMPLATE: case_study</a:t>
+            </a:r>
+          </a:p>
+        </p:txBody>
+      </p:sp>
+      <p:sp>
+        <p:nvSpPr>
+          <p:cNvPr id="4" name="Slide Number Placeholder 3"/>
+          <p:cNvSpPr>
+            <a:spLocks noGrp="1"/>
+          </p:cNvSpPr>
+          <p:nvPr>
+            <p:ph type="sldNum" idx="5" sz="quarter"/>
+          </p:nvPr>
+        </p:nvSpPr>
+        <p:spPr/>
+      </p:sp>
+    </p:spTree>
+  </p:cSld>
+  <p:clrMapOvr>
+    <a:masterClrMapping/>
+  </p:clrMapOvr>
+</p:notes>
+</file>
+
+<file path=ppt/notesSlides/notesSlide2.xml><?xml version="1.0" encoding="utf-8"?>
+<p:notes xmlns:a="http://schemas.openxmlformats.org/drawingml/2006/main" xmlns:p="http://schemas.openxmlformats.org/presentationml/2006/main" xmlns:r="http://schemas.openxmlformats.org/officeDocument/2006/relationships">
+  <p:cSld>
+    <p:spTree>
+      <p:nvGrpSpPr>
+        <p:cNvPr id="1" name=""/>
+        <p:cNvGrpSpPr/>
+        <p:nvPr/>
+      </p:nvGrpSpPr>
+      <p:grpSpPr>
+        <a:xfrm>
+          <a:off x="0" y="0"/>
+          <a:ext cx="0" cy="0"/>
+          <a:chOff x="0" y="0"/>
+          <a:chExt cx="0" cy="0"/>
+        </a:xfrm>
+      </p:grpSpPr>
+      <p:sp>
+        <p:nvSpPr>
+          <p:cNvPr id="2" name="Slide Image Placeholder 1"/>
+          <p:cNvSpPr>
+            <a:spLocks noGrp="1"/>
+          </p:cNvSpPr>
+          <p:nvPr>
+            <p:ph type="sldImg" idx="2"/>
+          </p:nvPr>
+        </p:nvSpPr>
+        <p:spPr/>
+      </p:sp>
+      <p:sp>
+        <p:nvSpPr>
+          <p:cNvPr id="3" name="Notes Placeholder 2"/>
+          <p:cNvSpPr>
+            <a:spLocks noGrp="1"/>
+          </p:cNvSpPr>
+          <p:nvPr>
+            <p:ph type="body" idx="3" sz="quarter"/>
+          </p:nvPr>
+        </p:nvSpPr>
+        <p:spPr/>
+        <p:txBody>
+          <a:bodyPr/>
+          <a:lstStyle/>
+          <a:p>
+            <a:r>
+              <a:t>J2W_TEMPLATE: case_study_full</a:t>
             </a:r>
           </a:p>
         </p:txBody>
@@ -3636,6 +3707,354 @@
                 </a:solidFill>
               </a:rPr>
               <a:t>Generated slide — replace with the real J2W template</a:t>
+            </a:r>
+          </a:p>
+        </p:txBody>
+      </p:sp>
+    </p:spTree>
+  </p:cSld>
+  <p:clrMapOvr>
+    <a:masterClrMapping/>
+  </p:clrMapOvr>
+</p:sld>
+</file>
+
+<file path=ppt/slides/slide2.xml><?xml version="1.0" encoding="utf-8"?>
+<p:sld xmlns:a="http://schemas.openxmlformats.org/drawingml/2006/main" xmlns:p="http://schemas.openxmlformats.org/presentationml/2006/main" xmlns:r="http://schemas.openxmlformats.org/officeDocument/2006/relationships">
+  <p:cSld>
+    <p:spTree>
+      <p:nvGrpSpPr>
+        <p:cNvPr id="1" name=""/>
+        <p:cNvGrpSpPr/>
+        <p:nvPr/>
+      </p:nvGrpSpPr>
+      <p:grpSpPr/>
+      <p:sp>
+        <p:nvSpPr>
+          <p:cNvPr id="2" name="TextBox 1"/>
+          <p:cNvSpPr txBox="1"/>
+          <p:nvPr/>
+        </p:nvSpPr>
+        <p:spPr>
+          <a:xfrm>
+            <a:off x="548640" y="320040"/>
+            <a:ext cx="11064240" cy="640080"/>
+          </a:xfrm>
+          <a:prstGeom prst="rect">
+            <a:avLst/>
+          </a:prstGeom>
+          <a:noFill/>
+        </p:spPr>
+        <p:txBody>
+          <a:bodyPr wrap="square">
+            <a:spAutoFit/>
+          </a:bodyPr>
+          <a:lstStyle/>
+          <a:p>
+            <a:r>
+              <a:rPr sz="2600" b="1" i="0">
+                <a:solidFill>
+                  <a:srgbClr val="2C6E66"/>
+                </a:solidFill>
+              </a:rPr>
+              <a:t>{{TITLE}}</a:t>
+            </a:r>
+          </a:p>
+        </p:txBody>
+      </p:sp>
+      <p:sp>
+        <p:nvSpPr>
+          <p:cNvPr id="3" name="TextBox 2"/>
+          <p:cNvSpPr txBox="1"/>
+          <p:nvPr/>
+        </p:nvSpPr>
+        <p:spPr>
+          <a:xfrm>
+            <a:off x="548640" y="960120"/>
+            <a:ext cx="11064240" cy="365760"/>
+          </a:xfrm>
+          <a:prstGeom prst="rect">
+            <a:avLst/>
+          </a:prstGeom>
+          <a:noFill/>
+        </p:spPr>
+        <p:txBody>
+          <a:bodyPr wrap="square">
+            <a:spAutoFit/>
+          </a:bodyPr>
+          <a:lstStyle/>
+          <a:p>
+            <a:r>
+              <a:rPr sz="1300" b="0" i="1">
+                <a:solidFill>
+                  <a:srgbClr val="6B7280"/>
+                </a:solidFill>
+              </a:rPr>
+              <a:t>{{SUBHEAD}}</a:t>
+            </a:r>
+          </a:p>
+        </p:txBody>
+      </p:sp>
+      <p:sp>
+        <p:nvSpPr>
+          <p:cNvPr id="4" name="TextBox 3"/>
+          <p:cNvSpPr txBox="1"/>
+          <p:nvPr/>
+        </p:nvSpPr>
+        <p:spPr>
+          <a:xfrm>
+            <a:off x="548640" y="1600200"/>
+            <a:ext cx="5394960" cy="274320"/>
+          </a:xfrm>
+          <a:prstGeom prst="rect">
+            <a:avLst/>
+          </a:prstGeom>
+          <a:noFill/>
+        </p:spPr>
+        <p:txBody>
+          <a:bodyPr wrap="square">
+            <a:spAutoFit/>
+          </a:bodyPr>
+          <a:lstStyle/>
+          <a:p>
+            <a:r>
+              <a:rPr sz="1200" b="1" i="0">
+                <a:solidFill>
+                  <a:srgbClr val="2C6E66"/>
+                </a:solidFill>
+              </a:rPr>
+              <a:t>THE CHALLENGE</a:t>
+            </a:r>
+          </a:p>
+        </p:txBody>
+      </p:sp>
+      <p:sp>
+        <p:nvSpPr>
+          <p:cNvPr id="5" name="TextBox 4"/>
+          <p:cNvSpPr txBox="1"/>
+          <p:nvPr/>
+        </p:nvSpPr>
+        <p:spPr>
+          <a:xfrm>
+            <a:off x="548640" y="1901952"/>
+            <a:ext cx="5394960" cy="1554480"/>
+          </a:xfrm>
+          <a:prstGeom prst="rect">
+            <a:avLst/>
+          </a:prstGeom>
+          <a:noFill/>
+        </p:spPr>
+        <p:txBody>
+          <a:bodyPr wrap="square">
+            <a:spAutoFit/>
+          </a:bodyPr>
+          <a:lstStyle/>
+          <a:p>
+            <a:r>
+              <a:rPr sz="1200" b="0" i="0">
+                <a:solidFill>
+                  <a:srgbClr val="111110"/>
+                </a:solidFill>
+              </a:rPr>
+              <a:t>{{CHALLENGE}}</a:t>
+            </a:r>
+          </a:p>
+        </p:txBody>
+      </p:sp>
+      <p:sp>
+        <p:nvSpPr>
+          <p:cNvPr id="6" name="TextBox 5"/>
+          <p:cNvSpPr txBox="1"/>
+          <p:nvPr/>
+        </p:nvSpPr>
+        <p:spPr>
+          <a:xfrm>
+            <a:off x="548640" y="3611880"/>
+            <a:ext cx="5394960" cy="274320"/>
+          </a:xfrm>
+          <a:prstGeom prst="rect">
+            <a:avLst/>
+          </a:prstGeom>
+          <a:noFill/>
+        </p:spPr>
+        <p:txBody>
+          <a:bodyPr wrap="square">
+            <a:spAutoFit/>
+          </a:bodyPr>
+          <a:lstStyle/>
+          <a:p>
+            <a:r>
+              <a:rPr sz="1200" b="1" i="0">
+                <a:solidFill>
+                  <a:srgbClr val="2C6E66"/>
+                </a:solidFill>
+              </a:rPr>
+              <a:t>THE SOLUTION</a:t>
+            </a:r>
+          </a:p>
+        </p:txBody>
+      </p:sp>
+      <p:sp>
+        <p:nvSpPr>
+          <p:cNvPr id="7" name="TextBox 6"/>
+          <p:cNvSpPr txBox="1"/>
+          <p:nvPr/>
+        </p:nvSpPr>
+        <p:spPr>
+          <a:xfrm>
+            <a:off x="548640" y="3913632"/>
+            <a:ext cx="5394960" cy="1554480"/>
+          </a:xfrm>
+          <a:prstGeom prst="rect">
+            <a:avLst/>
+          </a:prstGeom>
+          <a:noFill/>
+        </p:spPr>
+        <p:txBody>
+          <a:bodyPr wrap="square">
+            <a:spAutoFit/>
+          </a:bodyPr>
+          <a:lstStyle/>
+          <a:p>
+            <a:r>
+              <a:rPr sz="1200" b="0" i="0">
+                <a:solidFill>
+                  <a:srgbClr val="111110"/>
+                </a:solidFill>
+              </a:rPr>
+              <a:t>{{SOLUTION}}</a:t>
+            </a:r>
+          </a:p>
+        </p:txBody>
+      </p:sp>
+      <p:sp>
+        <p:nvSpPr>
+          <p:cNvPr id="8" name="TextBox 7"/>
+          <p:cNvSpPr txBox="1"/>
+          <p:nvPr/>
+        </p:nvSpPr>
+        <p:spPr>
+          <a:xfrm>
+            <a:off x="6217920" y="1600200"/>
+            <a:ext cx="5394960" cy="274320"/>
+          </a:xfrm>
+          <a:prstGeom prst="rect">
+            <a:avLst/>
+          </a:prstGeom>
+          <a:noFill/>
+        </p:spPr>
+        <p:txBody>
+          <a:bodyPr wrap="square">
+            <a:spAutoFit/>
+          </a:bodyPr>
+          <a:lstStyle/>
+          <a:p>
+            <a:r>
+              <a:rPr sz="1200" b="1" i="0">
+                <a:solidFill>
+                  <a:srgbClr val="2C6E66"/>
+                </a:solidFill>
+              </a:rPr>
+              <a:t>KEY CAPABILITIES</a:t>
+            </a:r>
+          </a:p>
+        </p:txBody>
+      </p:sp>
+      <p:sp>
+        <p:nvSpPr>
+          <p:cNvPr id="9" name="TextBox 8"/>
+          <p:cNvSpPr txBox="1"/>
+          <p:nvPr/>
+        </p:nvSpPr>
+        <p:spPr>
+          <a:xfrm>
+            <a:off x="6217920" y="1901952"/>
+            <a:ext cx="5394960" cy="2468880"/>
+          </a:xfrm>
+          <a:prstGeom prst="rect">
+            <a:avLst/>
+          </a:prstGeom>
+          <a:noFill/>
+        </p:spPr>
+        <p:txBody>
+          <a:bodyPr wrap="square">
+            <a:spAutoFit/>
+          </a:bodyPr>
+          <a:lstStyle/>
+          <a:p>
+            <a:r>
+              <a:rPr sz="1200" b="0" i="0">
+                <a:solidFill>
+                  <a:srgbClr val="111110"/>
+                </a:solidFill>
+              </a:rPr>
+              <a:t>{{CAPABILITIES}}</a:t>
+            </a:r>
+          </a:p>
+        </p:txBody>
+      </p:sp>
+      <p:sp>
+        <p:nvSpPr>
+          <p:cNvPr id="10" name="TextBox 9"/>
+          <p:cNvSpPr txBox="1"/>
+          <p:nvPr/>
+        </p:nvSpPr>
+        <p:spPr>
+          <a:xfrm>
+            <a:off x="6217920" y="4526280"/>
+            <a:ext cx="5394960" cy="274320"/>
+          </a:xfrm>
+          <a:prstGeom prst="rect">
+            <a:avLst/>
+          </a:prstGeom>
+          <a:noFill/>
+        </p:spPr>
+        <p:txBody>
+          <a:bodyPr wrap="square">
+            <a:spAutoFit/>
+          </a:bodyPr>
+          <a:lstStyle/>
+          <a:p>
+            <a:r>
+              <a:rPr sz="1200" b="1" i="0">
+                <a:solidFill>
+                  <a:srgbClr val="2C6E66"/>
+                </a:solidFill>
+              </a:rPr>
+              <a:t>RESULTS</a:t>
+            </a:r>
+          </a:p>
+        </p:txBody>
+      </p:sp>
+      <p:sp>
+        <p:nvSpPr>
+          <p:cNvPr id="11" name="TextBox 10"/>
+          <p:cNvSpPr txBox="1"/>
+          <p:nvPr/>
+        </p:nvSpPr>
+        <p:spPr>
+          <a:xfrm>
+            <a:off x="6217920" y="4828032"/>
+            <a:ext cx="5394960" cy="1280160"/>
+          </a:xfrm>
+          <a:prstGeom prst="rect">
+            <a:avLst/>
+          </a:prstGeom>
+          <a:noFill/>
+        </p:spPr>
+        <p:txBody>
+          <a:bodyPr wrap="square">
+            <a:spAutoFit/>
+          </a:bodyPr>
+          <a:lstStyle/>
+          <a:p>
+            <a:r>
+              <a:rPr sz="1200" b="0" i="0">
+                <a:solidFill>
+                  <a:srgbClr val="111110"/>
+                </a:solidFill>
+              </a:rPr>
+              <a:t>{{RESULTS}}</a:t>
             </a:r>
           </a:p>
         </p:txBody>

--- a/templates.pptx
+++ b/templates.pptx
@@ -7,6 +7,9 @@
   <p:sldIdLst>
     <p:sldId id="256" r:id="rId7"/>
     <p:sldId id="257" r:id="rId9"/>
+    <p:sldId id="258" r:id="rId10"/>
+    <p:sldId id="259" r:id="rId11"/>
+    <p:sldId id="260" r:id="rId12"/>
   </p:sldIdLst>
   <p:sldSz cx="12192000" cy="6858000" type="screen4x3"/>
   <p:notesSz cx="6858000" cy="9144000"/>
@@ -574,6 +577,216 @@
           <a:p>
             <a:r>
               <a:t>J2W_TEMPLATE: case_study_full</a:t>
+            </a:r>
+          </a:p>
+        </p:txBody>
+      </p:sp>
+      <p:sp>
+        <p:nvSpPr>
+          <p:cNvPr id="4" name="Slide Number Placeholder 3"/>
+          <p:cNvSpPr>
+            <a:spLocks noGrp="1"/>
+          </p:cNvSpPr>
+          <p:nvPr>
+            <p:ph type="sldNum" idx="5" sz="quarter"/>
+          </p:nvPr>
+        </p:nvSpPr>
+        <p:spPr/>
+      </p:sp>
+    </p:spTree>
+  </p:cSld>
+  <p:clrMapOvr>
+    <a:masterClrMapping/>
+  </p:clrMapOvr>
+</p:notes>
+</file>
+
+<file path=ppt/notesSlides/notesSlide3.xml><?xml version="1.0" encoding="utf-8"?>
+<p:notes xmlns:a="http://schemas.openxmlformats.org/drawingml/2006/main" xmlns:p="http://schemas.openxmlformats.org/presentationml/2006/main" xmlns:r="http://schemas.openxmlformats.org/officeDocument/2006/relationships">
+  <p:cSld>
+    <p:spTree>
+      <p:nvGrpSpPr>
+        <p:cNvPr id="1" name=""/>
+        <p:cNvGrpSpPr/>
+        <p:nvPr/>
+      </p:nvGrpSpPr>
+      <p:grpSpPr>
+        <a:xfrm>
+          <a:off x="0" y="0"/>
+          <a:ext cx="0" cy="0"/>
+          <a:chOff x="0" y="0"/>
+          <a:chExt cx="0" cy="0"/>
+        </a:xfrm>
+      </p:grpSpPr>
+      <p:sp>
+        <p:nvSpPr>
+          <p:cNvPr id="2" name="Slide Image Placeholder 1"/>
+          <p:cNvSpPr>
+            <a:spLocks noGrp="1"/>
+          </p:cNvSpPr>
+          <p:nvPr>
+            <p:ph type="sldImg" idx="2"/>
+          </p:nvPr>
+        </p:nvSpPr>
+        <p:spPr/>
+      </p:sp>
+      <p:sp>
+        <p:nvSpPr>
+          <p:cNvPr id="3" name="Notes Placeholder 2"/>
+          <p:cNvSpPr>
+            <a:spLocks noGrp="1"/>
+          </p:cNvSpPr>
+          <p:nvPr>
+            <p:ph type="body" idx="3" sz="quarter"/>
+          </p:nvPr>
+        </p:nvSpPr>
+        <p:spPr/>
+        <p:txBody>
+          <a:bodyPr/>
+          <a:lstStyle/>
+          <a:p>
+            <a:r>
+              <a:t>J2W_TEMPLATE: industry_strength</a:t>
+            </a:r>
+          </a:p>
+        </p:txBody>
+      </p:sp>
+      <p:sp>
+        <p:nvSpPr>
+          <p:cNvPr id="4" name="Slide Number Placeholder 3"/>
+          <p:cNvSpPr>
+            <a:spLocks noGrp="1"/>
+          </p:cNvSpPr>
+          <p:nvPr>
+            <p:ph type="sldNum" idx="5" sz="quarter"/>
+          </p:nvPr>
+        </p:nvSpPr>
+        <p:spPr/>
+      </p:sp>
+    </p:spTree>
+  </p:cSld>
+  <p:clrMapOvr>
+    <a:masterClrMapping/>
+  </p:clrMapOvr>
+</p:notes>
+</file>
+
+<file path=ppt/notesSlides/notesSlide4.xml><?xml version="1.0" encoding="utf-8"?>
+<p:notes xmlns:a="http://schemas.openxmlformats.org/drawingml/2006/main" xmlns:p="http://schemas.openxmlformats.org/presentationml/2006/main" xmlns:r="http://schemas.openxmlformats.org/officeDocument/2006/relationships">
+  <p:cSld>
+    <p:spTree>
+      <p:nvGrpSpPr>
+        <p:cNvPr id="1" name=""/>
+        <p:cNvGrpSpPr/>
+        <p:nvPr/>
+      </p:nvGrpSpPr>
+      <p:grpSpPr>
+        <a:xfrm>
+          <a:off x="0" y="0"/>
+          <a:ext cx="0" cy="0"/>
+          <a:chOff x="0" y="0"/>
+          <a:chExt cx="0" cy="0"/>
+        </a:xfrm>
+      </p:grpSpPr>
+      <p:sp>
+        <p:nvSpPr>
+          <p:cNvPr id="2" name="Slide Image Placeholder 1"/>
+          <p:cNvSpPr>
+            <a:spLocks noGrp="1"/>
+          </p:cNvSpPr>
+          <p:nvPr>
+            <p:ph type="sldImg" idx="2"/>
+          </p:nvPr>
+        </p:nvSpPr>
+        <p:spPr/>
+      </p:sp>
+      <p:sp>
+        <p:nvSpPr>
+          <p:cNvPr id="3" name="Notes Placeholder 2"/>
+          <p:cNvSpPr>
+            <a:spLocks noGrp="1"/>
+          </p:cNvSpPr>
+          <p:nvPr>
+            <p:ph type="body" idx="3" sz="quarter"/>
+          </p:nvPr>
+        </p:nvSpPr>
+        <p:spPr/>
+        <p:txBody>
+          <a:bodyPr/>
+          <a:lstStyle/>
+          <a:p>
+            <a:r>
+              <a:t>J2W_TEMPLATE: skill_deepdive</a:t>
+            </a:r>
+          </a:p>
+        </p:txBody>
+      </p:sp>
+      <p:sp>
+        <p:nvSpPr>
+          <p:cNvPr id="4" name="Slide Number Placeholder 3"/>
+          <p:cNvSpPr>
+            <a:spLocks noGrp="1"/>
+          </p:cNvSpPr>
+          <p:nvPr>
+            <p:ph type="sldNum" idx="5" sz="quarter"/>
+          </p:nvPr>
+        </p:nvSpPr>
+        <p:spPr/>
+      </p:sp>
+    </p:spTree>
+  </p:cSld>
+  <p:clrMapOvr>
+    <a:masterClrMapping/>
+  </p:clrMapOvr>
+</p:notes>
+</file>
+
+<file path=ppt/notesSlides/notesSlide5.xml><?xml version="1.0" encoding="utf-8"?>
+<p:notes xmlns:a="http://schemas.openxmlformats.org/drawingml/2006/main" xmlns:p="http://schemas.openxmlformats.org/presentationml/2006/main" xmlns:r="http://schemas.openxmlformats.org/officeDocument/2006/relationships">
+  <p:cSld>
+    <p:spTree>
+      <p:nvGrpSpPr>
+        <p:cNvPr id="1" name=""/>
+        <p:cNvGrpSpPr/>
+        <p:nvPr/>
+      </p:nvGrpSpPr>
+      <p:grpSpPr>
+        <a:xfrm>
+          <a:off x="0" y="0"/>
+          <a:ext cx="0" cy="0"/>
+          <a:chOff x="0" y="0"/>
+          <a:chExt cx="0" cy="0"/>
+        </a:xfrm>
+      </p:grpSpPr>
+      <p:sp>
+        <p:nvSpPr>
+          <p:cNvPr id="2" name="Slide Image Placeholder 1"/>
+          <p:cNvSpPr>
+            <a:spLocks noGrp="1"/>
+          </p:cNvSpPr>
+          <p:nvPr>
+            <p:ph type="sldImg" idx="2"/>
+          </p:nvPr>
+        </p:nvSpPr>
+        <p:spPr/>
+      </p:sp>
+      <p:sp>
+        <p:nvSpPr>
+          <p:cNvPr id="3" name="Notes Placeholder 2"/>
+          <p:cNvSpPr>
+            <a:spLocks noGrp="1"/>
+          </p:cNvSpPr>
+          <p:nvPr>
+            <p:ph type="body" idx="3" sz="quarter"/>
+          </p:nvPr>
+        </p:nvSpPr>
+        <p:spPr/>
+        <p:txBody>
+          <a:bodyPr/>
+          <a:lstStyle/>
+          <a:p>
+            <a:r>
+              <a:t>J2W_TEMPLATE: company_footprint</a:t>
             </a:r>
           </a:p>
         </p:txBody>
@@ -4055,6 +4268,1149 @@
                 </a:solidFill>
               </a:rPr>
               <a:t>{{RESULTS}}</a:t>
+            </a:r>
+          </a:p>
+        </p:txBody>
+      </p:sp>
+    </p:spTree>
+  </p:cSld>
+  <p:clrMapOvr>
+    <a:masterClrMapping/>
+  </p:clrMapOvr>
+</p:sld>
+</file>
+
+<file path=ppt/slides/slide3.xml><?xml version="1.0" encoding="utf-8"?>
+<p:sld xmlns:a="http://schemas.openxmlformats.org/drawingml/2006/main" xmlns:p="http://schemas.openxmlformats.org/presentationml/2006/main" xmlns:r="http://schemas.openxmlformats.org/officeDocument/2006/relationships">
+  <p:cSld>
+    <p:spTree>
+      <p:nvGrpSpPr>
+        <p:cNvPr id="1" name=""/>
+        <p:cNvGrpSpPr/>
+        <p:nvPr/>
+      </p:nvGrpSpPr>
+      <p:grpSpPr/>
+      <p:sp>
+        <p:nvSpPr>
+          <p:cNvPr id="2" name="TextBox 1"/>
+          <p:cNvSpPr txBox="1"/>
+          <p:nvPr/>
+        </p:nvSpPr>
+        <p:spPr>
+          <a:xfrm>
+            <a:off x="365760" y="182880"/>
+            <a:ext cx="7772400" cy="685800"/>
+          </a:xfrm>
+          <a:prstGeom prst="rect">
+            <a:avLst/>
+          </a:prstGeom>
+          <a:noFill/>
+        </p:spPr>
+        <p:txBody>
+          <a:bodyPr wrap="square">
+            <a:spAutoFit/>
+          </a:bodyPr>
+          <a:lstStyle/>
+          <a:p>
+            <a:r>
+              <a:rPr sz="2800" b="1">
+                <a:solidFill>
+                  <a:srgbClr val="111110"/>
+                </a:solidFill>
+              </a:rPr>
+              <a:t>{{INDUSTRY_NAME}}</a:t>
+            </a:r>
+          </a:p>
+        </p:txBody>
+      </p:sp>
+      <p:sp>
+        <p:nvSpPr>
+          <p:cNvPr id="3" name="TextBox 2"/>
+          <p:cNvSpPr txBox="1"/>
+          <p:nvPr/>
+        </p:nvSpPr>
+        <p:spPr>
+          <a:xfrm>
+            <a:off x="365760" y="822960"/>
+            <a:ext cx="7772400" cy="347472"/>
+          </a:xfrm>
+          <a:prstGeom prst="rect">
+            <a:avLst/>
+          </a:prstGeom>
+          <a:noFill/>
+        </p:spPr>
+        <p:txBody>
+          <a:bodyPr wrap="square">
+            <a:spAutoFit/>
+          </a:bodyPr>
+          <a:lstStyle/>
+          <a:p>
+            <a:r>
+              <a:rPr sz="1100" b="0">
+                <a:solidFill>
+                  <a:srgbClr val="6E6E69"/>
+                </a:solidFill>
+              </a:rPr>
+              <a:t>Our J2W delivery track record in this industry</a:t>
+            </a:r>
+          </a:p>
+        </p:txBody>
+      </p:sp>
+      <p:sp>
+        <p:nvSpPr>
+          <p:cNvPr id="4" name="TextBox 3"/>
+          <p:cNvSpPr txBox="1"/>
+          <p:nvPr/>
+        </p:nvSpPr>
+        <p:spPr>
+          <a:xfrm>
+            <a:off x="365760" y="1280160"/>
+            <a:ext cx="2286000" cy="548640"/>
+          </a:xfrm>
+          <a:prstGeom prst="rect">
+            <a:avLst/>
+          </a:prstGeom>
+          <a:noFill/>
+        </p:spPr>
+        <p:txBody>
+          <a:bodyPr wrap="square">
+            <a:spAutoFit/>
+          </a:bodyPr>
+          <a:lstStyle/>
+          <a:p>
+            <a:r>
+              <a:rPr sz="2400" b="1">
+                <a:solidFill>
+                  <a:srgbClr val="2C6E66"/>
+                </a:solidFill>
+              </a:rPr>
+              <a:t>{{TOTAL_CONSULTANTS}}</a:t>
+            </a:r>
+          </a:p>
+        </p:txBody>
+      </p:sp>
+      <p:sp>
+        <p:nvSpPr>
+          <p:cNvPr id="5" name="TextBox 4"/>
+          <p:cNvSpPr txBox="1"/>
+          <p:nvPr/>
+        </p:nvSpPr>
+        <p:spPr>
+          <a:xfrm>
+            <a:off x="365760" y="1755648"/>
+            <a:ext cx="2286000" cy="320040"/>
+          </a:xfrm>
+          <a:prstGeom prst="rect">
+            <a:avLst/>
+          </a:prstGeom>
+          <a:noFill/>
+        </p:spPr>
+        <p:txBody>
+          <a:bodyPr wrap="square">
+            <a:spAutoFit/>
+          </a:bodyPr>
+          <a:lstStyle/>
+          <a:p>
+            <a:r>
+              <a:rPr sz="1000" b="0">
+                <a:solidFill>
+                  <a:srgbClr val="6E6E69"/>
+                </a:solidFill>
+              </a:rPr>
+              <a:t>Consultants deployed</a:t>
+            </a:r>
+          </a:p>
+        </p:txBody>
+      </p:sp>
+      <p:sp>
+        <p:nvSpPr>
+          <p:cNvPr id="6" name="TextBox 5"/>
+          <p:cNvSpPr txBox="1"/>
+          <p:nvPr/>
+        </p:nvSpPr>
+        <p:spPr>
+          <a:xfrm>
+            <a:off x="365760" y="2084831"/>
+            <a:ext cx="2286000" cy="548640"/>
+          </a:xfrm>
+          <a:prstGeom prst="rect">
+            <a:avLst/>
+          </a:prstGeom>
+          <a:noFill/>
+        </p:spPr>
+        <p:txBody>
+          <a:bodyPr wrap="square">
+            <a:spAutoFit/>
+          </a:bodyPr>
+          <a:lstStyle/>
+          <a:p>
+            <a:r>
+              <a:rPr sz="2400" b="1">
+                <a:solidFill>
+                  <a:srgbClr val="2C6E66"/>
+                </a:solidFill>
+              </a:rPr>
+              <a:t>{{NUM_COMPANIES}}</a:t>
+            </a:r>
+          </a:p>
+        </p:txBody>
+      </p:sp>
+      <p:sp>
+        <p:nvSpPr>
+          <p:cNvPr id="7" name="TextBox 6"/>
+          <p:cNvSpPr txBox="1"/>
+          <p:nvPr/>
+        </p:nvSpPr>
+        <p:spPr>
+          <a:xfrm>
+            <a:off x="365760" y="2560320"/>
+            <a:ext cx="2286000" cy="320040"/>
+          </a:xfrm>
+          <a:prstGeom prst="rect">
+            <a:avLst/>
+          </a:prstGeom>
+          <a:noFill/>
+        </p:spPr>
+        <p:txBody>
+          <a:bodyPr wrap="square">
+            <a:spAutoFit/>
+          </a:bodyPr>
+          <a:lstStyle/>
+          <a:p>
+            <a:r>
+              <a:rPr sz="1000" b="0">
+                <a:solidFill>
+                  <a:srgbClr val="6E6E69"/>
+                </a:solidFill>
+              </a:rPr>
+              <a:t>Companies served</a:t>
+            </a:r>
+          </a:p>
+        </p:txBody>
+      </p:sp>
+      <p:sp>
+        <p:nvSpPr>
+          <p:cNvPr id="8" name="TextBox 7"/>
+          <p:cNvSpPr txBox="1"/>
+          <p:nvPr/>
+        </p:nvSpPr>
+        <p:spPr>
+          <a:xfrm>
+            <a:off x="365760" y="2889504"/>
+            <a:ext cx="2286000" cy="548640"/>
+          </a:xfrm>
+          <a:prstGeom prst="rect">
+            <a:avLst/>
+          </a:prstGeom>
+          <a:noFill/>
+        </p:spPr>
+        <p:txBody>
+          <a:bodyPr wrap="square">
+            <a:spAutoFit/>
+          </a:bodyPr>
+          <a:lstStyle/>
+          <a:p>
+            <a:r>
+              <a:rPr sz="2400" b="1">
+                <a:solidFill>
+                  <a:srgbClr val="2C6E66"/>
+                </a:solidFill>
+              </a:rPr>
+              <a:t>{{NUM_FUNCTIONS}}</a:t>
+            </a:r>
+          </a:p>
+        </p:txBody>
+      </p:sp>
+      <p:sp>
+        <p:nvSpPr>
+          <p:cNvPr id="9" name="TextBox 8"/>
+          <p:cNvSpPr txBox="1"/>
+          <p:nvPr/>
+        </p:nvSpPr>
+        <p:spPr>
+          <a:xfrm>
+            <a:off x="365760" y="3364992"/>
+            <a:ext cx="2286000" cy="320040"/>
+          </a:xfrm>
+          <a:prstGeom prst="rect">
+            <a:avLst/>
+          </a:prstGeom>
+          <a:noFill/>
+        </p:spPr>
+        <p:txBody>
+          <a:bodyPr wrap="square">
+            <a:spAutoFit/>
+          </a:bodyPr>
+          <a:lstStyle/>
+          <a:p>
+            <a:r>
+              <a:rPr sz="1000" b="0">
+                <a:solidFill>
+                  <a:srgbClr val="6E6E69"/>
+                </a:solidFill>
+              </a:rPr>
+              <a:t>Functions delivered</a:t>
+            </a:r>
+          </a:p>
+        </p:txBody>
+      </p:sp>
+      <p:sp>
+        <p:nvSpPr>
+          <p:cNvPr id="10" name="TextBox 9"/>
+          <p:cNvSpPr txBox="1"/>
+          <p:nvPr/>
+        </p:nvSpPr>
+        <p:spPr>
+          <a:xfrm>
+            <a:off x="365760" y="3694176"/>
+            <a:ext cx="2286000" cy="548640"/>
+          </a:xfrm>
+          <a:prstGeom prst="rect">
+            <a:avLst/>
+          </a:prstGeom>
+          <a:noFill/>
+        </p:spPr>
+        <p:txBody>
+          <a:bodyPr wrap="square">
+            <a:spAutoFit/>
+          </a:bodyPr>
+          <a:lstStyle/>
+          <a:p>
+            <a:r>
+              <a:rPr sz="2400" b="1">
+                <a:solidFill>
+                  <a:srgbClr val="2C6E66"/>
+                </a:solidFill>
+              </a:rPr>
+              <a:t>{{NUM_SKILLS}}</a:t>
+            </a:r>
+          </a:p>
+        </p:txBody>
+      </p:sp>
+      <p:sp>
+        <p:nvSpPr>
+          <p:cNvPr id="11" name="TextBox 10"/>
+          <p:cNvSpPr txBox="1"/>
+          <p:nvPr/>
+        </p:nvSpPr>
+        <p:spPr>
+          <a:xfrm>
+            <a:off x="365760" y="4169664"/>
+            <a:ext cx="2286000" cy="320040"/>
+          </a:xfrm>
+          <a:prstGeom prst="rect">
+            <a:avLst/>
+          </a:prstGeom>
+          <a:noFill/>
+        </p:spPr>
+        <p:txBody>
+          <a:bodyPr wrap="square">
+            <a:spAutoFit/>
+          </a:bodyPr>
+          <a:lstStyle/>
+          <a:p>
+            <a:r>
+              <a:rPr sz="1000" b="0">
+                <a:solidFill>
+                  <a:srgbClr val="6E6E69"/>
+                </a:solidFill>
+              </a:rPr>
+              <a:t>Distinct skills</a:t>
+            </a:r>
+          </a:p>
+        </p:txBody>
+      </p:sp>
+      <p:sp>
+        <p:nvSpPr>
+          <p:cNvPr id="12" name="TextBox 11"/>
+          <p:cNvSpPr txBox="1"/>
+          <p:nvPr/>
+        </p:nvSpPr>
+        <p:spPr>
+          <a:xfrm>
+            <a:off x="365760" y="4526280"/>
+            <a:ext cx="4754880" cy="274320"/>
+          </a:xfrm>
+          <a:prstGeom prst="rect">
+            <a:avLst/>
+          </a:prstGeom>
+          <a:noFill/>
+        </p:spPr>
+        <p:txBody>
+          <a:bodyPr wrap="square">
+            <a:spAutoFit/>
+          </a:bodyPr>
+          <a:lstStyle/>
+          <a:p>
+            <a:r>
+              <a:rPr sz="900" b="1">
+                <a:solidFill>
+                  <a:srgbClr val="2C6E66"/>
+                </a:solidFill>
+              </a:rPr>
+              <a:t>TOP 3 FREQUENTLY HIRED SKILLS</a:t>
+            </a:r>
+          </a:p>
+        </p:txBody>
+      </p:sp>
+      <p:sp>
+        <p:nvSpPr>
+          <p:cNvPr id="13" name="TextBox 12"/>
+          <p:cNvSpPr txBox="1"/>
+          <p:nvPr/>
+        </p:nvSpPr>
+        <p:spPr>
+          <a:xfrm>
+            <a:off x="365760" y="4828032"/>
+            <a:ext cx="4754880" cy="347472"/>
+          </a:xfrm>
+          <a:prstGeom prst="rect">
+            <a:avLst/>
+          </a:prstGeom>
+          <a:noFill/>
+        </p:spPr>
+        <p:txBody>
+          <a:bodyPr wrap="square">
+            <a:spAutoFit/>
+          </a:bodyPr>
+          <a:lstStyle/>
+          <a:p>
+            <a:r>
+              <a:rPr sz="1200" b="1">
+                <a:solidFill>
+                  <a:srgbClr val="111110"/>
+                </a:solidFill>
+              </a:rPr>
+              <a:t>{{TOP_SKILL_1}}</a:t>
+            </a:r>
+          </a:p>
+        </p:txBody>
+      </p:sp>
+      <p:sp>
+        <p:nvSpPr>
+          <p:cNvPr id="14" name="TextBox 13"/>
+          <p:cNvSpPr txBox="1"/>
+          <p:nvPr/>
+        </p:nvSpPr>
+        <p:spPr>
+          <a:xfrm>
+            <a:off x="365760" y="5193792"/>
+            <a:ext cx="4754880" cy="347472"/>
+          </a:xfrm>
+          <a:prstGeom prst="rect">
+            <a:avLst/>
+          </a:prstGeom>
+          <a:noFill/>
+        </p:spPr>
+        <p:txBody>
+          <a:bodyPr wrap="square">
+            <a:spAutoFit/>
+          </a:bodyPr>
+          <a:lstStyle/>
+          <a:p>
+            <a:r>
+              <a:rPr sz="1200" b="0">
+                <a:solidFill>
+                  <a:srgbClr val="111110"/>
+                </a:solidFill>
+              </a:rPr>
+              <a:t>{{TOP_SKILL_2}}</a:t>
+            </a:r>
+          </a:p>
+        </p:txBody>
+      </p:sp>
+      <p:sp>
+        <p:nvSpPr>
+          <p:cNvPr id="15" name="TextBox 14"/>
+          <p:cNvSpPr txBox="1"/>
+          <p:nvPr/>
+        </p:nvSpPr>
+        <p:spPr>
+          <a:xfrm>
+            <a:off x="365760" y="5559552"/>
+            <a:ext cx="4754880" cy="347472"/>
+          </a:xfrm>
+          <a:prstGeom prst="rect">
+            <a:avLst/>
+          </a:prstGeom>
+          <a:noFill/>
+        </p:spPr>
+        <p:txBody>
+          <a:bodyPr wrap="square">
+            <a:spAutoFit/>
+          </a:bodyPr>
+          <a:lstStyle/>
+          <a:p>
+            <a:r>
+              <a:rPr sz="1200" b="0">
+                <a:solidFill>
+                  <a:srgbClr val="111110"/>
+                </a:solidFill>
+              </a:rPr>
+              <a:t>{{TOP_SKILL_3}}</a:t>
+            </a:r>
+          </a:p>
+        </p:txBody>
+      </p:sp>
+      <p:sp>
+        <p:nvSpPr>
+          <p:cNvPr id="16" name="TextBox 15"/>
+          <p:cNvSpPr txBox="1"/>
+          <p:nvPr/>
+        </p:nvSpPr>
+        <p:spPr>
+          <a:xfrm>
+            <a:off x="5486400" y="1188720"/>
+            <a:ext cx="6217920" cy="5029200"/>
+          </a:xfrm>
+          <a:prstGeom prst="rect">
+            <a:avLst/>
+          </a:prstGeom>
+          <a:noFill/>
+        </p:spPr>
+        <p:txBody>
+          <a:bodyPr wrap="square">
+            <a:spAutoFit/>
+          </a:bodyPr>
+          <a:lstStyle/>
+          <a:p>
+            <a:r>
+              <a:rPr sz="1100" b="0">
+                <a:solidFill>
+                  <a:srgbClr val="6E6E69"/>
+                </a:solidFill>
+              </a:rPr>
+              <a:t>{{CHART}}</a:t>
+            </a:r>
+          </a:p>
+        </p:txBody>
+      </p:sp>
+    </p:spTree>
+  </p:cSld>
+  <p:clrMapOvr>
+    <a:masterClrMapping/>
+  </p:clrMapOvr>
+</p:sld>
+</file>
+
+<file path=ppt/slides/slide4.xml><?xml version="1.0" encoding="utf-8"?>
+<p:sld xmlns:a="http://schemas.openxmlformats.org/drawingml/2006/main" xmlns:p="http://schemas.openxmlformats.org/presentationml/2006/main" xmlns:r="http://schemas.openxmlformats.org/officeDocument/2006/relationships">
+  <p:cSld>
+    <p:spTree>
+      <p:nvGrpSpPr>
+        <p:cNvPr id="1" name=""/>
+        <p:cNvGrpSpPr/>
+        <p:nvPr/>
+      </p:nvGrpSpPr>
+      <p:grpSpPr/>
+      <p:sp>
+        <p:nvSpPr>
+          <p:cNvPr id="2" name="TextBox 1"/>
+          <p:cNvSpPr txBox="1"/>
+          <p:nvPr/>
+        </p:nvSpPr>
+        <p:spPr>
+          <a:xfrm>
+            <a:off x="365760" y="182880"/>
+            <a:ext cx="7772400" cy="685800"/>
+          </a:xfrm>
+          <a:prstGeom prst="rect">
+            <a:avLst/>
+          </a:prstGeom>
+          <a:noFill/>
+        </p:spPr>
+        <p:txBody>
+          <a:bodyPr wrap="square">
+            <a:spAutoFit/>
+          </a:bodyPr>
+          <a:lstStyle/>
+          <a:p>
+            <a:r>
+              <a:rPr sz="2600" b="1">
+                <a:solidFill>
+                  <a:srgbClr val="111110"/>
+                </a:solidFill>
+              </a:rPr>
+              <a:t>{{SKILLS_HEADER}}</a:t>
+            </a:r>
+          </a:p>
+        </p:txBody>
+      </p:sp>
+      <p:sp>
+        <p:nvSpPr>
+          <p:cNvPr id="3" name="TextBox 2"/>
+          <p:cNvSpPr txBox="1"/>
+          <p:nvPr/>
+        </p:nvSpPr>
+        <p:spPr>
+          <a:xfrm>
+            <a:off x="365760" y="822960"/>
+            <a:ext cx="7772400" cy="347472"/>
+          </a:xfrm>
+          <a:prstGeom prst="rect">
+            <a:avLst/>
+          </a:prstGeom>
+          <a:noFill/>
+        </p:spPr>
+        <p:txBody>
+          <a:bodyPr wrap="square">
+            <a:spAutoFit/>
+          </a:bodyPr>
+          <a:lstStyle/>
+          <a:p>
+            <a:r>
+              <a:rPr sz="1100" b="0">
+                <a:solidFill>
+                  <a:srgbClr val="6E6E69"/>
+                </a:solidFill>
+              </a:rPr>
+              <a:t>Skills J2W has deployed — track record &amp; reach</a:t>
+            </a:r>
+          </a:p>
+        </p:txBody>
+      </p:sp>
+      <p:sp>
+        <p:nvSpPr>
+          <p:cNvPr id="4" name="TextBox 3"/>
+          <p:cNvSpPr txBox="1"/>
+          <p:nvPr/>
+        </p:nvSpPr>
+        <p:spPr>
+          <a:xfrm>
+            <a:off x="365760" y="1298448"/>
+            <a:ext cx="4937760" cy="256032"/>
+          </a:xfrm>
+          <a:prstGeom prst="rect">
+            <a:avLst/>
+          </a:prstGeom>
+          <a:noFill/>
+        </p:spPr>
+        <p:txBody>
+          <a:bodyPr wrap="square">
+            <a:spAutoFit/>
+          </a:bodyPr>
+          <a:lstStyle/>
+          <a:p>
+            <a:r>
+              <a:rPr sz="900" b="1">
+                <a:solidFill>
+                  <a:srgbClr val="2C6E66"/>
+                </a:solidFill>
+              </a:rPr>
+              <a:t>DEPLOYMENT SUMMARY</a:t>
+            </a:r>
+          </a:p>
+        </p:txBody>
+      </p:sp>
+      <p:sp>
+        <p:nvSpPr>
+          <p:cNvPr id="5" name="TextBox 4"/>
+          <p:cNvSpPr txBox="1"/>
+          <p:nvPr/>
+        </p:nvSpPr>
+        <p:spPr>
+          <a:xfrm>
+            <a:off x="365760" y="1591056"/>
+            <a:ext cx="4937760" cy="4572000"/>
+          </a:xfrm>
+          <a:prstGeom prst="rect">
+            <a:avLst/>
+          </a:prstGeom>
+          <a:noFill/>
+        </p:spPr>
+        <p:txBody>
+          <a:bodyPr wrap="square">
+            <a:spAutoFit/>
+          </a:bodyPr>
+          <a:lstStyle/>
+          <a:p>
+            <a:r>
+              <a:rPr sz="1100" b="0">
+                <a:solidFill>
+                  <a:srgbClr val="111110"/>
+                </a:solidFill>
+              </a:rPr>
+              <a:t>{{SKILL_SUMMARY}}</a:t>
+            </a:r>
+          </a:p>
+        </p:txBody>
+      </p:sp>
+      <p:sp>
+        <p:nvSpPr>
+          <p:cNvPr id="6" name="TextBox 5"/>
+          <p:cNvSpPr txBox="1"/>
+          <p:nvPr/>
+        </p:nvSpPr>
+        <p:spPr>
+          <a:xfrm>
+            <a:off x="5486400" y="1188720"/>
+            <a:ext cx="6217920" cy="5029200"/>
+          </a:xfrm>
+          <a:prstGeom prst="rect">
+            <a:avLst/>
+          </a:prstGeom>
+          <a:noFill/>
+        </p:spPr>
+        <p:txBody>
+          <a:bodyPr wrap="square">
+            <a:spAutoFit/>
+          </a:bodyPr>
+          <a:lstStyle/>
+          <a:p>
+            <a:r>
+              <a:rPr sz="1100" b="0">
+                <a:solidFill>
+                  <a:srgbClr val="6E6E69"/>
+                </a:solidFill>
+              </a:rPr>
+              <a:t>{{CHART}}</a:t>
+            </a:r>
+          </a:p>
+        </p:txBody>
+      </p:sp>
+    </p:spTree>
+  </p:cSld>
+  <p:clrMapOvr>
+    <a:masterClrMapping/>
+  </p:clrMapOvr>
+</p:sld>
+</file>
+
+<file path=ppt/slides/slide5.xml><?xml version="1.0" encoding="utf-8"?>
+<p:sld xmlns:a="http://schemas.openxmlformats.org/drawingml/2006/main" xmlns:p="http://schemas.openxmlformats.org/presentationml/2006/main" xmlns:r="http://schemas.openxmlformats.org/officeDocument/2006/relationships">
+  <p:cSld>
+    <p:spTree>
+      <p:nvGrpSpPr>
+        <p:cNvPr id="1" name=""/>
+        <p:cNvGrpSpPr/>
+        <p:nvPr/>
+      </p:nvGrpSpPr>
+      <p:grpSpPr/>
+      <p:sp>
+        <p:nvSpPr>
+          <p:cNvPr id="2" name="TextBox 1"/>
+          <p:cNvSpPr txBox="1"/>
+          <p:nvPr/>
+        </p:nvSpPr>
+        <p:spPr>
+          <a:xfrm>
+            <a:off x="365760" y="182880"/>
+            <a:ext cx="7772400" cy="685800"/>
+          </a:xfrm>
+          <a:prstGeom prst="rect">
+            <a:avLst/>
+          </a:prstGeom>
+          <a:noFill/>
+        </p:spPr>
+        <p:txBody>
+          <a:bodyPr wrap="square">
+            <a:spAutoFit/>
+          </a:bodyPr>
+          <a:lstStyle/>
+          <a:p>
+            <a:r>
+              <a:rPr sz="2800" b="1">
+                <a:solidFill>
+                  <a:srgbClr val="111110"/>
+                </a:solidFill>
+              </a:rPr>
+              <a:t>{{COMPANY_NAME}}</a:t>
+            </a:r>
+          </a:p>
+        </p:txBody>
+      </p:sp>
+      <p:sp>
+        <p:nvSpPr>
+          <p:cNvPr id="3" name="TextBox 2"/>
+          <p:cNvSpPr txBox="1"/>
+          <p:nvPr/>
+        </p:nvSpPr>
+        <p:spPr>
+          <a:xfrm>
+            <a:off x="365760" y="822960"/>
+            <a:ext cx="7772400" cy="347472"/>
+          </a:xfrm>
+          <a:prstGeom prst="rect">
+            <a:avLst/>
+          </a:prstGeom>
+          <a:noFill/>
+        </p:spPr>
+        <p:txBody>
+          <a:bodyPr wrap="square">
+            <a:spAutoFit/>
+          </a:bodyPr>
+          <a:lstStyle/>
+          <a:p>
+            <a:r>
+              <a:rPr sz="1100" b="0">
+                <a:solidFill>
+                  <a:srgbClr val="6E6E69"/>
+                </a:solidFill>
+              </a:rPr>
+              <a:t>Our existing J2W relationship — people, skills &amp; engagement</a:t>
+            </a:r>
+          </a:p>
+        </p:txBody>
+      </p:sp>
+      <p:sp>
+        <p:nvSpPr>
+          <p:cNvPr id="4" name="TextBox 3"/>
+          <p:cNvSpPr txBox="1"/>
+          <p:nvPr/>
+        </p:nvSpPr>
+        <p:spPr>
+          <a:xfrm>
+            <a:off x="365760" y="1280160"/>
+            <a:ext cx="2286000" cy="548640"/>
+          </a:xfrm>
+          <a:prstGeom prst="rect">
+            <a:avLst/>
+          </a:prstGeom>
+          <a:noFill/>
+        </p:spPr>
+        <p:txBody>
+          <a:bodyPr wrap="square">
+            <a:spAutoFit/>
+          </a:bodyPr>
+          <a:lstStyle/>
+          <a:p>
+            <a:r>
+              <a:rPr sz="2400" b="1">
+                <a:solidFill>
+                  <a:srgbClr val="2C6E66"/>
+                </a:solidFill>
+              </a:rPr>
+              <a:t>{{TOTAL_DEPLOYED}}</a:t>
+            </a:r>
+          </a:p>
+        </p:txBody>
+      </p:sp>
+      <p:sp>
+        <p:nvSpPr>
+          <p:cNvPr id="5" name="TextBox 4"/>
+          <p:cNvSpPr txBox="1"/>
+          <p:nvPr/>
+        </p:nvSpPr>
+        <p:spPr>
+          <a:xfrm>
+            <a:off x="365760" y="1755648"/>
+            <a:ext cx="2286000" cy="320040"/>
+          </a:xfrm>
+          <a:prstGeom prst="rect">
+            <a:avLst/>
+          </a:prstGeom>
+          <a:noFill/>
+        </p:spPr>
+        <p:txBody>
+          <a:bodyPr wrap="square">
+            <a:spAutoFit/>
+          </a:bodyPr>
+          <a:lstStyle/>
+          <a:p>
+            <a:r>
+              <a:rPr sz="1000" b="0">
+                <a:solidFill>
+                  <a:srgbClr val="6E6E69"/>
+                </a:solidFill>
+              </a:rPr>
+              <a:t>Consultants deployed</a:t>
+            </a:r>
+          </a:p>
+        </p:txBody>
+      </p:sp>
+      <p:sp>
+        <p:nvSpPr>
+          <p:cNvPr id="6" name="TextBox 5"/>
+          <p:cNvSpPr txBox="1"/>
+          <p:nvPr/>
+        </p:nvSpPr>
+        <p:spPr>
+          <a:xfrm>
+            <a:off x="365760" y="2084831"/>
+            <a:ext cx="2286000" cy="548640"/>
+          </a:xfrm>
+          <a:prstGeom prst="rect">
+            <a:avLst/>
+          </a:prstGeom>
+          <a:noFill/>
+        </p:spPr>
+        <p:txBody>
+          <a:bodyPr wrap="square">
+            <a:spAutoFit/>
+          </a:bodyPr>
+          <a:lstStyle/>
+          <a:p>
+            <a:r>
+              <a:rPr sz="2400" b="1">
+                <a:solidFill>
+                  <a:srgbClr val="2C6E66"/>
+                </a:solidFill>
+              </a:rPr>
+              <a:t>{{NUM_FUNCTIONS_CO}}</a:t>
+            </a:r>
+          </a:p>
+        </p:txBody>
+      </p:sp>
+      <p:sp>
+        <p:nvSpPr>
+          <p:cNvPr id="7" name="TextBox 6"/>
+          <p:cNvSpPr txBox="1"/>
+          <p:nvPr/>
+        </p:nvSpPr>
+        <p:spPr>
+          <a:xfrm>
+            <a:off x="365760" y="2560320"/>
+            <a:ext cx="2286000" cy="320040"/>
+          </a:xfrm>
+          <a:prstGeom prst="rect">
+            <a:avLst/>
+          </a:prstGeom>
+          <a:noFill/>
+        </p:spPr>
+        <p:txBody>
+          <a:bodyPr wrap="square">
+            <a:spAutoFit/>
+          </a:bodyPr>
+          <a:lstStyle/>
+          <a:p>
+            <a:r>
+              <a:rPr sz="1000" b="0">
+                <a:solidFill>
+                  <a:srgbClr val="6E6E69"/>
+                </a:solidFill>
+              </a:rPr>
+              <a:t>Functions delivered</a:t>
+            </a:r>
+          </a:p>
+        </p:txBody>
+      </p:sp>
+      <p:sp>
+        <p:nvSpPr>
+          <p:cNvPr id="8" name="TextBox 7"/>
+          <p:cNvSpPr txBox="1"/>
+          <p:nvPr/>
+        </p:nvSpPr>
+        <p:spPr>
+          <a:xfrm>
+            <a:off x="365760" y="2889504"/>
+            <a:ext cx="2286000" cy="548640"/>
+          </a:xfrm>
+          <a:prstGeom prst="rect">
+            <a:avLst/>
+          </a:prstGeom>
+          <a:noFill/>
+        </p:spPr>
+        <p:txBody>
+          <a:bodyPr wrap="square">
+            <a:spAutoFit/>
+          </a:bodyPr>
+          <a:lstStyle/>
+          <a:p>
+            <a:r>
+              <a:rPr sz="2400" b="1">
+                <a:solidFill>
+                  <a:srgbClr val="2C6E66"/>
+                </a:solidFill>
+              </a:rPr>
+              <a:t>{{NUM_SKILLS_CO}}</a:t>
+            </a:r>
+          </a:p>
+        </p:txBody>
+      </p:sp>
+      <p:sp>
+        <p:nvSpPr>
+          <p:cNvPr id="9" name="TextBox 8"/>
+          <p:cNvSpPr txBox="1"/>
+          <p:nvPr/>
+        </p:nvSpPr>
+        <p:spPr>
+          <a:xfrm>
+            <a:off x="365760" y="3364992"/>
+            <a:ext cx="2286000" cy="320040"/>
+          </a:xfrm>
+          <a:prstGeom prst="rect">
+            <a:avLst/>
+          </a:prstGeom>
+          <a:noFill/>
+        </p:spPr>
+        <p:txBody>
+          <a:bodyPr wrap="square">
+            <a:spAutoFit/>
+          </a:bodyPr>
+          <a:lstStyle/>
+          <a:p>
+            <a:r>
+              <a:rPr sz="1000" b="0">
+                <a:solidFill>
+                  <a:srgbClr val="6E6E69"/>
+                </a:solidFill>
+              </a:rPr>
+              <a:t>Distinct skills</a:t>
+            </a:r>
+          </a:p>
+        </p:txBody>
+      </p:sp>
+      <p:sp>
+        <p:nvSpPr>
+          <p:cNvPr id="10" name="TextBox 9"/>
+          <p:cNvSpPr txBox="1"/>
+          <p:nvPr/>
+        </p:nvSpPr>
+        <p:spPr>
+          <a:xfrm>
+            <a:off x="365760" y="3694176"/>
+            <a:ext cx="2286000" cy="548640"/>
+          </a:xfrm>
+          <a:prstGeom prst="rect">
+            <a:avLst/>
+          </a:prstGeom>
+          <a:noFill/>
+        </p:spPr>
+        <p:txBody>
+          <a:bodyPr wrap="square">
+            <a:spAutoFit/>
+          </a:bodyPr>
+          <a:lstStyle/>
+          <a:p>
+            <a:r>
+              <a:rPr sz="2400" b="1">
+                <a:solidFill>
+                  <a:srgbClr val="2C6E66"/>
+                </a:solidFill>
+              </a:rPr>
+              <a:t>{{ENGAGEMENT_TYPE}}</a:t>
+            </a:r>
+          </a:p>
+        </p:txBody>
+      </p:sp>
+      <p:sp>
+        <p:nvSpPr>
+          <p:cNvPr id="11" name="TextBox 10"/>
+          <p:cNvSpPr txBox="1"/>
+          <p:nvPr/>
+        </p:nvSpPr>
+        <p:spPr>
+          <a:xfrm>
+            <a:off x="365760" y="4169664"/>
+            <a:ext cx="2286000" cy="320040"/>
+          </a:xfrm>
+          <a:prstGeom prst="rect">
+            <a:avLst/>
+          </a:prstGeom>
+          <a:noFill/>
+        </p:spPr>
+        <p:txBody>
+          <a:bodyPr wrap="square">
+            <a:spAutoFit/>
+          </a:bodyPr>
+          <a:lstStyle/>
+          <a:p>
+            <a:r>
+              <a:rPr sz="1000" b="0">
+                <a:solidFill>
+                  <a:srgbClr val="6E6E69"/>
+                </a:solidFill>
+              </a:rPr>
+              <a:t>Engagement type</a:t>
+            </a:r>
+          </a:p>
+        </p:txBody>
+      </p:sp>
+      <p:sp>
+        <p:nvSpPr>
+          <p:cNvPr id="12" name="TextBox 11"/>
+          <p:cNvSpPr txBox="1"/>
+          <p:nvPr/>
+        </p:nvSpPr>
+        <p:spPr>
+          <a:xfrm>
+            <a:off x="365760" y="4526280"/>
+            <a:ext cx="4937760" cy="256032"/>
+          </a:xfrm>
+          <a:prstGeom prst="rect">
+            <a:avLst/>
+          </a:prstGeom>
+          <a:noFill/>
+        </p:spPr>
+        <p:txBody>
+          <a:bodyPr wrap="square">
+            <a:spAutoFit/>
+          </a:bodyPr>
+          <a:lstStyle/>
+          <a:p>
+            <a:r>
+              <a:rPr sz="900" b="1">
+                <a:solidFill>
+                  <a:srgbClr val="2C6E66"/>
+                </a:solidFill>
+              </a:rPr>
+              <a:t>FUNCTION BREAKDOWN</a:t>
+            </a:r>
+          </a:p>
+        </p:txBody>
+      </p:sp>
+      <p:sp>
+        <p:nvSpPr>
+          <p:cNvPr id="13" name="TextBox 12"/>
+          <p:cNvSpPr txBox="1"/>
+          <p:nvPr/>
+        </p:nvSpPr>
+        <p:spPr>
+          <a:xfrm>
+            <a:off x="365760" y="4809744"/>
+            <a:ext cx="4937760" cy="1737360"/>
+          </a:xfrm>
+          <a:prstGeom prst="rect">
+            <a:avLst/>
+          </a:prstGeom>
+          <a:noFill/>
+        </p:spPr>
+        <p:txBody>
+          <a:bodyPr wrap="square">
+            <a:spAutoFit/>
+          </a:bodyPr>
+          <a:lstStyle/>
+          <a:p>
+            <a:r>
+              <a:rPr sz="1100" b="0">
+                <a:solidFill>
+                  <a:srgbClr val="111110"/>
+                </a:solidFill>
+              </a:rPr>
+              <a:t>{{FUNCTION_BREAKDOWN}}</a:t>
+            </a:r>
+          </a:p>
+        </p:txBody>
+      </p:sp>
+      <p:sp>
+        <p:nvSpPr>
+          <p:cNvPr id="14" name="TextBox 13"/>
+          <p:cNvSpPr txBox="1"/>
+          <p:nvPr/>
+        </p:nvSpPr>
+        <p:spPr>
+          <a:xfrm>
+            <a:off x="5486400" y="1188720"/>
+            <a:ext cx="6217920" cy="5029200"/>
+          </a:xfrm>
+          <a:prstGeom prst="rect">
+            <a:avLst/>
+          </a:prstGeom>
+          <a:noFill/>
+        </p:spPr>
+        <p:txBody>
+          <a:bodyPr wrap="square">
+            <a:spAutoFit/>
+          </a:bodyPr>
+          <a:lstStyle/>
+          <a:p>
+            <a:r>
+              <a:rPr sz="1100" b="0">
+                <a:solidFill>
+                  <a:srgbClr val="6E6E69"/>
+                </a:solidFill>
+              </a:rPr>
+              <a:t>{{CHART}}</a:t>
             </a:r>
           </a:p>
         </p:txBody>
